--- a/media/resources/BanktikEseptoolor/Statements-Card-Sort.pptx
+++ b/media/resources/BanktikEseptoolor/Statements-Card-Sort.pptx
@@ -3081,7 +3081,7 @@
             <a:pPr algn="ctr"/>
             <a:r>
               <a:rPr lang="en-GB" dirty="0"/>
-              <a:t>£625.50</a:t>
+              <a:t>£625,50</a:t>
             </a:r>
           </a:p>
         </p:txBody>
@@ -3124,7 +3124,7 @@
             <a:pPr algn="ctr"/>
             <a:r>
               <a:rPr lang="en-GB" dirty="0"/>
-              <a:t>£72.30</a:t>
+              <a:t>£72,30</a:t>
             </a:r>
           </a:p>
         </p:txBody>
@@ -3167,7 +3167,7 @@
             <a:pPr algn="ctr"/>
             <a:r>
               <a:rPr lang="en-GB" dirty="0"/>
-              <a:t>£32.99</a:t>
+              <a:t>£32,99</a:t>
             </a:r>
           </a:p>
         </p:txBody>
@@ -3210,7 +3210,7 @@
             <a:pPr algn="ctr"/>
             <a:r>
               <a:rPr lang="en-GB" dirty="0"/>
-              <a:t>£5.66</a:t>
+              <a:t>£5,66</a:t>
             </a:r>
           </a:p>
         </p:txBody>
@@ -3347,7 +3347,7 @@
             <a:pPr algn="ctr"/>
             <a:r>
               <a:rPr lang="en-GB" dirty="0"/>
-              <a:t>£82.45</a:t>
+              <a:t>£82,45</a:t>
             </a:r>
           </a:p>
         </p:txBody>
@@ -3433,7 +3433,7 @@
             <a:pPr algn="ctr"/>
             <a:r>
               <a:rPr lang="en-GB" dirty="0"/>
-              <a:t>£45.20</a:t>
+              <a:t>£45,20</a:t>
             </a:r>
           </a:p>
         </p:txBody>
@@ -3519,7 +3519,7 @@
             <a:pPr algn="ctr"/>
             <a:r>
               <a:rPr lang="en-GB" dirty="0"/>
-              <a:t>£165.80</a:t>
+              <a:t>£165,80</a:t>
             </a:r>
           </a:p>
         </p:txBody>
@@ -4370,7 +4370,7 @@
             <a:pPr algn="ctr"/>
             <a:r>
               <a:rPr lang="en-GB" dirty="0"/>
-              <a:t>£625.50</a:t>
+              <a:t>£625,50</a:t>
             </a:r>
           </a:p>
         </p:txBody>
@@ -4413,7 +4413,7 @@
             <a:pPr algn="ctr"/>
             <a:r>
               <a:rPr lang="en-GB" dirty="0"/>
-              <a:t>£72.30</a:t>
+              <a:t>£72,30</a:t>
             </a:r>
           </a:p>
         </p:txBody>
@@ -4456,7 +4456,7 @@
             <a:pPr algn="ctr"/>
             <a:r>
               <a:rPr lang="en-GB" dirty="0"/>
-              <a:t>£32.99</a:t>
+              <a:t>£32,99</a:t>
             </a:r>
           </a:p>
         </p:txBody>
@@ -4499,7 +4499,7 @@
             <a:pPr algn="ctr"/>
             <a:r>
               <a:rPr lang="en-GB" dirty="0"/>
-              <a:t>£5.66</a:t>
+              <a:t>£5,66</a:t>
             </a:r>
           </a:p>
         </p:txBody>
@@ -6325,7 +6325,7 @@
             <a:pPr algn="ctr"/>
             <a:r>
               <a:rPr lang="en-GB" dirty="0"/>
-              <a:t>£625.50</a:t>
+              <a:t>£625,50</a:t>
             </a:r>
           </a:p>
         </p:txBody>
@@ -6368,7 +6368,7 @@
             <a:pPr algn="ctr"/>
             <a:r>
               <a:rPr lang="en-GB" dirty="0"/>
-              <a:t>£72.30</a:t>
+              <a:t>£72,30</a:t>
             </a:r>
           </a:p>
         </p:txBody>
@@ -6411,7 +6411,7 @@
             <a:pPr algn="ctr"/>
             <a:r>
               <a:rPr lang="en-GB" dirty="0"/>
-              <a:t>£32.99</a:t>
+              <a:t>£32,99</a:t>
             </a:r>
           </a:p>
         </p:txBody>
@@ -6454,7 +6454,7 @@
             <a:pPr algn="ctr"/>
             <a:r>
               <a:rPr lang="en-GB" dirty="0"/>
-              <a:t>£5.66</a:t>
+              <a:t>£5,66</a:t>
             </a:r>
           </a:p>
         </p:txBody>
@@ -6591,7 +6591,7 @@
             <a:pPr algn="ctr"/>
             <a:r>
               <a:rPr lang="en-GB" dirty="0"/>
-              <a:t>£82.45</a:t>
+              <a:t>£82,45</a:t>
             </a:r>
           </a:p>
         </p:txBody>
@@ -6677,7 +6677,7 @@
             <a:pPr algn="ctr"/>
             <a:r>
               <a:rPr lang="en-GB" dirty="0"/>
-              <a:t>£45.20</a:t>
+              <a:t>£45,20</a:t>
             </a:r>
           </a:p>
         </p:txBody>
@@ -7521,7 +7521,7 @@
             <a:pPr algn="ctr"/>
             <a:r>
               <a:rPr lang="en-GB" dirty="0"/>
-              <a:t>£165.80</a:t>
+              <a:t>£165,80</a:t>
             </a:r>
           </a:p>
         </p:txBody>
@@ -8950,7 +8950,7 @@
             <a:pPr algn="ctr"/>
             <a:r>
               <a:rPr lang="en-GB" dirty="0"/>
-              <a:t>£625.50</a:t>
+              <a:t>£625,50</a:t>
             </a:r>
           </a:p>
         </p:txBody>
@@ -8993,7 +8993,7 @@
             <a:pPr algn="ctr"/>
             <a:r>
               <a:rPr lang="en-GB" dirty="0"/>
-              <a:t>£72.30</a:t>
+              <a:t>£72,30</a:t>
             </a:r>
           </a:p>
         </p:txBody>
@@ -9036,7 +9036,7 @@
             <a:pPr algn="ctr"/>
             <a:r>
               <a:rPr lang="en-GB" dirty="0"/>
-              <a:t>£32.99</a:t>
+              <a:t>£32,99</a:t>
             </a:r>
           </a:p>
         </p:txBody>
@@ -9079,7 +9079,7 @@
             <a:pPr algn="ctr"/>
             <a:r>
               <a:rPr lang="en-GB" dirty="0"/>
-              <a:t>£5.66</a:t>
+              <a:t>£5,66</a:t>
             </a:r>
           </a:p>
         </p:txBody>
@@ -9216,7 +9216,7 @@
             <a:pPr algn="ctr"/>
             <a:r>
               <a:rPr lang="en-GB" dirty="0"/>
-              <a:t>£82.45</a:t>
+              <a:t>£82,45</a:t>
             </a:r>
           </a:p>
         </p:txBody>
@@ -9302,7 +9302,7 @@
             <a:pPr algn="ctr"/>
             <a:r>
               <a:rPr lang="en-GB" dirty="0"/>
-              <a:t>£45.20</a:t>
+              <a:t>£45,20</a:t>
             </a:r>
           </a:p>
         </p:txBody>
@@ -9388,7 +9388,7 @@
             <a:pPr algn="ctr"/>
             <a:r>
               <a:rPr lang="en-GB" dirty="0"/>
-              <a:t>£165.80</a:t>
+              <a:t>£165,80</a:t>
             </a:r>
           </a:p>
         </p:txBody>
